--- a/src/lib/report/assets/default/issue_analysis_pptx.pptx
+++ b/src/lib/report/assets/default/issue_analysis_pptx.pptx
@@ -294,10 +294,11 @@
             <a:tbl>
               <a:tblPr firstRow="1" bandRow="1"/>
               <a:tblGrid>
-                <a:gridCol w="2247900"/>
-                <a:gridCol w="2247900"/>
-                <a:gridCol w="2247900"/>
-                <a:gridCol w="2247900"/>
+                <a:gridCol w="1798320"/>
+                <a:gridCol w="1798320"/>
+                <a:gridCol w="1798320"/>
+                <a:gridCol w="1798320"/>
+                <a:gridCol w="1798320"/>
               </a:tblGrid>
               <a:tr h="411480">
                 <a:tc>
@@ -314,6 +315,27 @@
                           <a:latin typeface="Arial"/>
                           <a:ea typeface="맑은 고딕"/>
                         </a:rPr>
+                        <a:t>영역</a:t>
+                      </a:r>
+                      <a:endParaRPr lang="ko-KR"/>
+                    </a:p>
+                  </a:txBody>
+                  <a:tcPr marL="91440" marR="91440" marT="91440" marB="91440"/>
+                </a:tc>
+                <a:tc>
+                  <a:txBody>
+                    <a:bodyPr wrap="square"/>
+                    <a:lstStyle/>
+                    <a:p>
+                      <a:pPr/>
+                      <a:r>
+                        <a:rPr lang="ko-KR" sz="1400">
+                          <a:solidFill>
+                            <a:srgbClr val="243247"/>
+                          </a:solidFill>
+                          <a:latin typeface="Arial"/>
+                          <a:ea typeface="맑은 고딕"/>
+                        </a:rPr>
                         <a:t>코드</a:t>
                       </a:r>
                       <a:endParaRPr lang="ko-KR"/>
@@ -400,7 +422,28 @@
                           <a:latin typeface="Arial"/>
                           <a:ea typeface="맑은 고딕"/>
                         </a:rPr>
-                        <a:t>{{#slide issues}}{{.code}}</a:t>
+                        <a:t>{{#slide issues}}{{.area_name}}</a:t>
+                      </a:r>
+                      <a:endParaRPr lang="ko-KR"/>
+                    </a:p>
+                  </a:txBody>
+                  <a:tcPr marL="91440" marR="91440" marT="91440" marB="91440"/>
+                </a:tc>
+                <a:tc>
+                  <a:txBody>
+                    <a:bodyPr wrap="square"/>
+                    <a:lstStyle/>
+                    <a:p>
+                      <a:pPr/>
+                      <a:r>
+                        <a:rPr lang="ko-KR" sz="1400">
+                          <a:solidFill>
+                            <a:srgbClr val="243247"/>
+                          </a:solidFill>
+                          <a:latin typeface="Arial"/>
+                          <a:ea typeface="맑은 고딕"/>
+                        </a:rPr>
+                        <a:t>{{.code}}</a:t>
                       </a:r>
                       <a:endParaRPr lang="ko-KR"/>
                     </a:p>

--- a/src/lib/report/assets/default/issue_analysis_pptx.pptx
+++ b/src/lib/report/assets/default/issue_analysis_pptx.pptx
@@ -2028,7 +2028,7 @@
                 <a:latin typeface="Arial"/>
                 <a:ea typeface="맑은 고딕"/>
               </a:rPr>
-              <a:t>{{#slide issues}}{{.code}} · 원인 분석 {{slide.continuation}}</a:t>
+              <a:t>{{#slide areas}}{{.code}} {{.name}} · 원인 분석 {{slide.continuation}}</a:t>
             </a:r>
             <a:endParaRPr lang="ko-KR"/>
           </a:p>
@@ -2066,45 +2066,7 @@
                 <a:latin typeface="Arial"/>
                 <a:ea typeface="맑은 고딕"/>
               </a:rPr>
-              <a:t>{{.title}}</a:t>
-            </a:r>
-            <a:endParaRPr lang="ko-KR"/>
-          </a:p>
-        </p:txBody>
-      </p:sp>
-      <p:sp>
-        <p:nvSpPr>
-          <p:cNvPr id="5" name="Text 5"/>
-          <p:cNvSpPr txBox="1"/>
-          <p:nvPr/>
-        </p:nvSpPr>
-        <p:spPr>
-          <a:xfrm>
-            <a:off x="457200" y="1234440"/>
-            <a:ext cx="8991600" cy="274320"/>
-          </a:xfrm>
-          <a:prstGeom prst="rect">
-            <a:avLst/>
-          </a:prstGeom>
-          <a:noFill/>
-          <a:ln>
-            <a:noFill/>
-          </a:ln>
-        </p:spPr>
-        <p:txBody>
-          <a:bodyPr wrap="square"/>
-          <a:lstStyle/>
-          <a:p>
-            <a:pPr/>
-            <a:r>
-              <a:rPr lang="ko-KR" sz="1100">
-                <a:solidFill>
-                  <a:srgbClr val="243247"/>
-                </a:solidFill>
-                <a:latin typeface="Arial"/>
-                <a:ea typeface="맑은 고딕"/>
-              </a:rPr>
-              <a:t>{{.area_code}} {{.area_name}} | 심각도 {{.severity_label}} · 상태 {{.status_label}}</a:t>
+              <a:t>전체 {{.summary.total_count}}건 | 열림 {{.summary.status.open}} · 진행중 {{.summary.status.in_progress}} · 해결 {{.summary.status.resolved}} · 보류 {{.summary.status.on_hold}}</a:t>
             </a:r>
             <a:endParaRPr lang="ko-KR"/>
           </a:p>
@@ -2117,7 +2079,7 @@
           <p:nvPr/>
         </p:nvGraphicFramePr>
         <p:xfrm>
-          <a:off x="457200" y="1645920"/>
+          <a:off x="457200" y="1463040"/>
           <a:ext cx="8988552" cy="1097280"/>
         </p:xfrm>
         <a:graphic>
@@ -2125,9 +2087,9 @@
             <a:tbl>
               <a:tblPr firstRow="1"/>
               <a:tblGrid>
-                <a:gridCol w="1463040"/>
-                <a:gridCol w="3749040"/>
-                <a:gridCol w="3776472"/>
+                <a:gridCol w="1005840"/>
+                <a:gridCol w="2377440"/>
+                <a:gridCol w="5605272"/>
               </a:tblGrid>
               <a:tr h="365760">
                 <a:tc>
@@ -2144,7 +2106,7 @@
                           <a:latin typeface="Arial"/>
                           <a:ea typeface="맑은 고딕"/>
                         </a:rPr>
-                        <a:t>원인 분류</a:t>
+                        <a:t>코드</a:t>
                       </a:r>
                       <a:endParaRPr lang="ko-KR"/>
                     </a:p>
@@ -2193,7 +2155,7 @@
                           <a:latin typeface="Arial"/>
                           <a:ea typeface="맑은 고딕"/>
                         </a:rPr>
-                        <a:t>직접 원인</a:t>
+                        <a:t>이슈</a:t>
                       </a:r>
                       <a:endParaRPr lang="ko-KR"/>
                     </a:p>
@@ -2242,7 +2204,7 @@
                           <a:latin typeface="Arial"/>
                           <a:ea typeface="맑은 고딕"/>
                         </a:rPr>
-                        <a:t>근본 원인</a:t>
+                        <a:t>원인 — [분류] 직접 원인 / 근본 원인</a:t>
                       </a:r>
                       <a:endParaRPr lang="ko-KR"/>
                     </a:p>
@@ -2293,7 +2255,7 @@
                           <a:latin typeface="Arial"/>
                           <a:ea typeface="맑은 고딕"/>
                         </a:rPr>
-                        <a:t>{{#rows .causes}}{{.category_label}}</a:t>
+                        <a:t>{{#rows .issues}}{{.code}}</a:t>
                       </a:r>
                       <a:endParaRPr lang="ko-KR"/>
                     </a:p>
@@ -2340,7 +2302,7 @@
                           <a:latin typeface="Arial"/>
                           <a:ea typeface="맑은 고딕"/>
                         </a:rPr>
-                        <a:t>{{.direct_cause}}</a:t>
+                        <a:t>{{.title}}</a:t>
                       </a:r>
                       <a:endParaRPr lang="ko-KR"/>
                     </a:p>
@@ -2387,7 +2349,21 @@
                           <a:latin typeface="Arial"/>
                           <a:ea typeface="맑은 고딕"/>
                         </a:rPr>
-                        <a:t>{{.root_cause}}{{/rows}}</a:t>
+                        <a:t>{{#items .causes}}[{{.category_label}}] {{.direct_cause}}</a:t>
+                      </a:r>
+                      <a:endParaRPr lang="ko-KR"/>
+                    </a:p>
+                    <a:p>
+                      <a:pPr/>
+                      <a:r>
+                        <a:rPr lang="ko-KR" sz="1100">
+                          <a:solidFill>
+                            <a:srgbClr val="243247"/>
+                          </a:solidFill>
+                          <a:latin typeface="Arial"/>
+                          <a:ea typeface="맑은 고딕"/>
+                        </a:rPr>
+                        <a:t>근본 원인: {{.root_cause}}{{/items}}{{/rows}}</a:t>
                       </a:r>
                       <a:endParaRPr lang="ko-KR"/>
                     </a:p>
@@ -2528,7 +2504,7 @@
                 <a:latin typeface="Arial"/>
                 <a:ea typeface="맑은 고딕"/>
               </a:rPr>
-              <a:t>{{#slide opportunities}}개선기회 {{.no}} · {{.title}} {{slide.continuation}}</a:t>
+              <a:t>{{#slide areas}}{{.code}} {{.name}} · 개선기회 {{slide.continuation}}</a:t>
             </a:r>
             <a:endParaRPr lang="ko-KR"/>
           </a:p>
@@ -2566,7 +2542,7 @@
                 <a:latin typeface="Arial"/>
                 <a:ea typeface="맑은 고딕"/>
               </a:rPr>
-              <a:t>{{.area_code}} {{.area_name}}</a:t>
+              <a:t>전체 {{.summary.total_count}}건의 이슈를 묶은 개선 방향</a:t>
             </a:r>
             <a:endParaRPr lang="ko-KR"/>
           </a:p>
@@ -2580,15 +2556,17 @@
         </p:nvGraphicFramePr>
         <p:xfrm>
           <a:off x="457200" y="1463040"/>
-          <a:ext cx="8988552" cy="1554480"/>
+          <a:ext cx="8988552" cy="1097280"/>
         </p:xfrm>
         <a:graphic>
           <a:graphicData uri="http://schemas.openxmlformats.org/drawingml/2006/table">
             <a:tbl>
               <a:tblPr firstRow="1"/>
               <a:tblGrid>
-                <a:gridCol w="1737360"/>
-                <a:gridCol w="7251192"/>
+                <a:gridCol w="640080"/>
+                <a:gridCol w="2377440"/>
+                <a:gridCol w="3383280"/>
+                <a:gridCol w="2587752"/>
               </a:tblGrid>
               <a:tr h="365760">
                 <a:tc>
@@ -2605,7 +2583,7 @@
                           <a:latin typeface="Arial"/>
                           <a:ea typeface="맑은 고딕"/>
                         </a:rPr>
-                        <a:t>구분</a:t>
+                        <a:t>번호</a:t>
                       </a:r>
                       <a:endParaRPr lang="ko-KR"/>
                     </a:p>
@@ -2654,7 +2632,7 @@
                           <a:latin typeface="Arial"/>
                           <a:ea typeface="맑은 고딕"/>
                         </a:rPr>
-                        <a:t>내용</a:t>
+                        <a:t>개선기회</a:t>
                       </a:r>
                       <a:endParaRPr lang="ko-KR"/>
                     </a:p>
@@ -2689,6 +2667,104 @@
                     </a:solidFill>
                   </a:tcPr>
                 </a:tc>
+                <a:tc>
+                  <a:txBody>
+                    <a:bodyPr wrap="square"/>
+                    <a:lstStyle/>
+                    <a:p>
+                      <a:pPr/>
+                      <a:r>
+                        <a:rPr lang="ko-KR" sz="1100" b="1">
+                          <a:solidFill>
+                            <a:srgbClr val="243247"/>
+                          </a:solidFill>
+                          <a:latin typeface="Arial"/>
+                          <a:ea typeface="맑은 고딕"/>
+                        </a:rPr>
+                        <a:t>개선 방향</a:t>
+                      </a:r>
+                      <a:endParaRPr lang="ko-KR"/>
+                    </a:p>
+                  </a:txBody>
+                  <a:tcPr marL="72000" marR="72000" marT="54000" marB="54000">
+                    <a:lnL w="6350" cap="flat" cmpd="sng" algn="ctr">
+                      <a:solidFill>
+                        <a:srgbClr val="C5CEDA"/>
+                      </a:solidFill>
+                      <a:prstDash val="solid"/>
+                    </a:lnL>
+                    <a:lnR w="6350" cap="flat" cmpd="sng" algn="ctr">
+                      <a:solidFill>
+                        <a:srgbClr val="C5CEDA"/>
+                      </a:solidFill>
+                      <a:prstDash val="solid"/>
+                    </a:lnR>
+                    <a:lnT w="6350" cap="flat" cmpd="sng" algn="ctr">
+                      <a:solidFill>
+                        <a:srgbClr val="C5CEDA"/>
+                      </a:solidFill>
+                      <a:prstDash val="solid"/>
+                    </a:lnT>
+                    <a:lnB w="6350" cap="flat" cmpd="sng" algn="ctr">
+                      <a:solidFill>
+                        <a:srgbClr val="C5CEDA"/>
+                      </a:solidFill>
+                      <a:prstDash val="solid"/>
+                    </a:lnB>
+                    <a:solidFill>
+                      <a:srgbClr val="E8EEF5"/>
+                    </a:solidFill>
+                  </a:tcPr>
+                </a:tc>
+                <a:tc>
+                  <a:txBody>
+                    <a:bodyPr wrap="square"/>
+                    <a:lstStyle/>
+                    <a:p>
+                      <a:pPr/>
+                      <a:r>
+                        <a:rPr lang="ko-KR" sz="1100" b="1">
+                          <a:solidFill>
+                            <a:srgbClr val="243247"/>
+                          </a:solidFill>
+                          <a:latin typeface="Arial"/>
+                          <a:ea typeface="맑은 고딕"/>
+                        </a:rPr>
+                        <a:t>연결 이슈</a:t>
+                      </a:r>
+                      <a:endParaRPr lang="ko-KR"/>
+                    </a:p>
+                  </a:txBody>
+                  <a:tcPr marL="72000" marR="72000" marT="54000" marB="54000">
+                    <a:lnL w="6350" cap="flat" cmpd="sng" algn="ctr">
+                      <a:solidFill>
+                        <a:srgbClr val="C5CEDA"/>
+                      </a:solidFill>
+                      <a:prstDash val="solid"/>
+                    </a:lnL>
+                    <a:lnR w="6350" cap="flat" cmpd="sng" algn="ctr">
+                      <a:solidFill>
+                        <a:srgbClr val="C5CEDA"/>
+                      </a:solidFill>
+                      <a:prstDash val="solid"/>
+                    </a:lnR>
+                    <a:lnT w="6350" cap="flat" cmpd="sng" algn="ctr">
+                      <a:solidFill>
+                        <a:srgbClr val="C5CEDA"/>
+                      </a:solidFill>
+                      <a:prstDash val="solid"/>
+                    </a:lnT>
+                    <a:lnB w="6350" cap="flat" cmpd="sng" algn="ctr">
+                      <a:solidFill>
+                        <a:srgbClr val="C5CEDA"/>
+                      </a:solidFill>
+                      <a:prstDash val="solid"/>
+                    </a:lnB>
+                    <a:solidFill>
+                      <a:srgbClr val="E8EEF5"/>
+                    </a:solidFill>
+                  </a:tcPr>
+                </a:tc>
               </a:tr>
               <a:tr h="731520">
                 <a:tc>
@@ -2705,7 +2781,7 @@
                           <a:latin typeface="Arial"/>
                           <a:ea typeface="맑은 고딕"/>
                         </a:rPr>
-                        <a:t>개선 방향</a:t>
+                        <a:t>{{#rows .opportunities}}{{.no}}</a:t>
                       </a:r>
                       <a:endParaRPr lang="ko-KR"/>
                     </a:p>
@@ -2752,6 +2828,53 @@
                           <a:latin typeface="Arial"/>
                           <a:ea typeface="맑은 고딕"/>
                         </a:rPr>
+                        <a:t>{{.title}}</a:t>
+                      </a:r>
+                      <a:endParaRPr lang="ko-KR"/>
+                    </a:p>
+                  </a:txBody>
+                  <a:tcPr marL="72000" marR="72000" marT="54000" marB="54000">
+                    <a:lnL w="6350" cap="flat" cmpd="sng" algn="ctr">
+                      <a:solidFill>
+                        <a:srgbClr val="C5CEDA"/>
+                      </a:solidFill>
+                      <a:prstDash val="solid"/>
+                    </a:lnL>
+                    <a:lnR w="6350" cap="flat" cmpd="sng" algn="ctr">
+                      <a:solidFill>
+                        <a:srgbClr val="C5CEDA"/>
+                      </a:solidFill>
+                      <a:prstDash val="solid"/>
+                    </a:lnR>
+                    <a:lnT w="6350" cap="flat" cmpd="sng" algn="ctr">
+                      <a:solidFill>
+                        <a:srgbClr val="C5CEDA"/>
+                      </a:solidFill>
+                      <a:prstDash val="solid"/>
+                    </a:lnT>
+                    <a:lnB w="6350" cap="flat" cmpd="sng" algn="ctr">
+                      <a:solidFill>
+                        <a:srgbClr val="C5CEDA"/>
+                      </a:solidFill>
+                      <a:prstDash val="solid"/>
+                    </a:lnB>
+                    <a:noFill/>
+                  </a:tcPr>
+                </a:tc>
+                <a:tc>
+                  <a:txBody>
+                    <a:bodyPr wrap="square"/>
+                    <a:lstStyle/>
+                    <a:p>
+                      <a:pPr/>
+                      <a:r>
+                        <a:rPr lang="ko-KR" sz="1100">
+                          <a:solidFill>
+                            <a:srgbClr val="243247"/>
+                          </a:solidFill>
+                          <a:latin typeface="Arial"/>
+                          <a:ea typeface="맑은 고딕"/>
+                        </a:rPr>
                         <a:t>{{.description}}</a:t>
                       </a:r>
                       <a:endParaRPr lang="ko-KR"/>
@@ -2785,8 +2908,6 @@
                     <a:noFill/>
                   </a:tcPr>
                 </a:tc>
-              </a:tr>
-              <a:tr h="457200">
                 <a:tc>
                   <a:txBody>
                     <a:bodyPr wrap="square"/>
@@ -2801,54 +2922,7 @@
                           <a:latin typeface="Arial"/>
                           <a:ea typeface="맑은 고딕"/>
                         </a:rPr>
-                        <a:t>{{#rows .issues}}연결 이슈 {{.code}}</a:t>
-                      </a:r>
-                      <a:endParaRPr lang="ko-KR"/>
-                    </a:p>
-                  </a:txBody>
-                  <a:tcPr marL="72000" marR="72000" marT="54000" marB="54000">
-                    <a:lnL w="6350" cap="flat" cmpd="sng" algn="ctr">
-                      <a:solidFill>
-                        <a:srgbClr val="C5CEDA"/>
-                      </a:solidFill>
-                      <a:prstDash val="solid"/>
-                    </a:lnL>
-                    <a:lnR w="6350" cap="flat" cmpd="sng" algn="ctr">
-                      <a:solidFill>
-                        <a:srgbClr val="C5CEDA"/>
-                      </a:solidFill>
-                      <a:prstDash val="solid"/>
-                    </a:lnR>
-                    <a:lnT w="6350" cap="flat" cmpd="sng" algn="ctr">
-                      <a:solidFill>
-                        <a:srgbClr val="C5CEDA"/>
-                      </a:solidFill>
-                      <a:prstDash val="solid"/>
-                    </a:lnT>
-                    <a:lnB w="6350" cap="flat" cmpd="sng" algn="ctr">
-                      <a:solidFill>
-                        <a:srgbClr val="C5CEDA"/>
-                      </a:solidFill>
-                      <a:prstDash val="solid"/>
-                    </a:lnB>
-                    <a:noFill/>
-                  </a:tcPr>
-                </a:tc>
-                <a:tc>
-                  <a:txBody>
-                    <a:bodyPr wrap="square"/>
-                    <a:lstStyle/>
-                    <a:p>
-                      <a:pPr/>
-                      <a:r>
-                        <a:rPr lang="ko-KR" sz="1100">
-                          <a:solidFill>
-                            <a:srgbClr val="243247"/>
-                          </a:solidFill>
-                          <a:latin typeface="Arial"/>
-                          <a:ea typeface="맑은 고딕"/>
-                        </a:rPr>
-                        <a:t>{{.title}}{{/rows}}</a:t>
+                        <a:t>{{#items .issues}}{{.code}} {{.title}}{{/items}}{{/rows}}</a:t>
                       </a:r>
                       <a:endParaRPr lang="ko-KR"/>
                     </a:p>
